--- a/Schools_ML_Track/camp_2026/slides/DA/DA05.pptx
+++ b/Schools_ML_Track/camp_2026/slides/DA/DA05.pptx
@@ -128,7 +128,7 @@
   <p:extLst>
     <p:ext uri="{521415D9-36F7-43E2-AB2F-B90AF26B5E84}">
       <p14:sectionLst xmlns:p14="http://schemas.microsoft.com/office/powerpoint/2010/main">
-        <p14:section name="Opening" id="{73ca8732-0708-0aa1-e922-80b05b00edac}">
+        <p14:section name="Opening" id="{ecf48c39-b4d7-1eac-2cd1-7e970554f5bb}">
           <p14:sldIdLst>
             <p14:sldId id="256"/>
             <p14:sldId id="257"/>
@@ -139,7 +139,7 @@
             <p14:sldId id="262"/>
           </p14:sldIdLst>
         </p14:section>
-        <p14:section name="Block A" id="{96a6939a-602d-ade2-44e9-32740fdcbb39}">
+        <p14:section name="Block A" id="{db1fdc90-ccea-bd0c-1900-7010107f4563}">
           <p14:sldIdLst>
             <p14:sldId id="263"/>
             <p14:sldId id="264"/>
@@ -149,15 +149,15 @@
             <p14:sldId id="269"/>
           </p14:sldIdLst>
         </p14:section>
-        <p14:section name="Break" id="{895909a2-c184-4952-0ef9-107b6e3f2e7c}">
+        <p14:section name="Break" id="{c772502c-1c20-e834-ea73-1b8693e417b2}">
           <p14:sldIdLst>
             <p14:sldId id="267"/>
           </p14:sldIdLst>
         </p14:section>
-        <p14:section name="Block A" id="{2f843355-b4af-6b7b-bb17-011dd7800e6d}">
+        <p14:section name="Block A" id="{2ee43be2-4314-9251-05dd-991e6bb5848f}">
           <p14:sldIdLst/>
         </p14:section>
-        <p14:section name="Block B" id="{d04128ce-2d10-1ef1-4f97-7bab1bc0650b}">
+        <p14:section name="Block B" id="{68e16365-92da-f719-a9d3-405f95797bd5}">
           <p14:sldIdLst>
             <p14:sldId id="270"/>
             <p14:sldId id="271"/>
@@ -166,7 +166,7 @@
             <p14:sldId id="274"/>
           </p14:sldIdLst>
         </p14:section>
-        <p14:section name="Make and close" id="{f5679ed9-cebf-19d1-8649-d4caa2a2a836}">
+        <p14:section name="Make and close" id="{486d0b78-363b-39d5-a21e-9cc1ed5370e8}">
           <p14:sldIdLst>
             <p14:sldId id="275"/>
             <p14:sldId id="276"/>

--- a/Schools_ML_Track/camp_2026/slides/DA/DA05.pptx
+++ b/Schools_ML_Track/camp_2026/slides/DA/DA05.pptx
@@ -128,7 +128,7 @@
   <p:extLst>
     <p:ext uri="{521415D9-36F7-43E2-AB2F-B90AF26B5E84}">
       <p14:sectionLst xmlns:p14="http://schemas.microsoft.com/office/powerpoint/2010/main">
-        <p14:section name="Opening" id="{ecf48c39-b4d7-1eac-2cd1-7e970554f5bb}">
+        <p14:section name="Opening" id="{219c3935-1ab1-1072-767b-541629bdcc56}">
           <p14:sldIdLst>
             <p14:sldId id="256"/>
             <p14:sldId id="257"/>
@@ -139,7 +139,7 @@
             <p14:sldId id="262"/>
           </p14:sldIdLst>
         </p14:section>
-        <p14:section name="Block A" id="{db1fdc90-ccea-bd0c-1900-7010107f4563}">
+        <p14:section name="Block A" id="{7e55d69e-00fd-57c7-0a51-6b8898ae6b82}">
           <p14:sldIdLst>
             <p14:sldId id="263"/>
             <p14:sldId id="264"/>
@@ -149,15 +149,15 @@
             <p14:sldId id="269"/>
           </p14:sldIdLst>
         </p14:section>
-        <p14:section name="Break" id="{c772502c-1c20-e834-ea73-1b8693e417b2}">
+        <p14:section name="Break" id="{2a975cfb-b670-2a47-45e5-af42f6a7e031}">
           <p14:sldIdLst>
             <p14:sldId id="267"/>
           </p14:sldIdLst>
         </p14:section>
-        <p14:section name="Block A" id="{2ee43be2-4314-9251-05dd-991e6bb5848f}">
+        <p14:section name="Block A" id="{b3fa574e-9205-cbe9-cff6-4333a2932427}">
           <p14:sldIdLst/>
         </p14:section>
-        <p14:section name="Block B" id="{68e16365-92da-f719-a9d3-405f95797bd5}">
+        <p14:section name="Block B" id="{565d2c9d-81ab-d373-b721-d9eabbc2cf39}">
           <p14:sldIdLst>
             <p14:sldId id="270"/>
             <p14:sldId id="271"/>
@@ -166,7 +166,7 @@
             <p14:sldId id="274"/>
           </p14:sldIdLst>
         </p14:section>
-        <p14:section name="Make and close" id="{486d0b78-363b-39d5-a21e-9cc1ed5370e8}">
+        <p14:section name="Make and close" id="{8e3c4cec-2535-42db-f043-c0fd6930f205}">
           <p14:sldIdLst>
             <p14:sldId id="275"/>
             <p14:sldId id="276"/>
@@ -5813,437 +5813,30 @@
           </a:p>
         </p:txBody>
       </p:sp>
-      <p:sp>
-        <p:nvSpPr>
-          <p:cNvPr id="4" name="Shape 2"/>
-          <p:cNvSpPr/>
+      <p:pic>
+        <p:nvPicPr>
+          <p:cNvPr id="4" name="Image 0" descr="Change one thing">    </p:cNvPr>
+          <p:cNvPicPr>
+            <a:picLocks noChangeAspect="1"/>
+          </p:cNvPicPr>
           <p:nvPr/>
-        </p:nvSpPr>
-        <p:spPr>
-          <a:xfrm>
-            <a:off x="7223760" y="1737360"/>
-            <a:ext cx="4297680" cy="2750312"/>
-          </a:xfrm>
-          <a:prstGeom prst="roundRect">
-            <a:avLst>
-              <a:gd name="adj" fmla="val 2660"/>
-            </a:avLst>
-          </a:prstGeom>
-          <a:solidFill>
-            <a:srgbClr val="111111"/>
-          </a:solidFill>
-          <a:ln/>
-        </p:spPr>
-      </p:sp>
-      <p:sp>
-        <p:nvSpPr>
-          <p:cNvPr id="5" name="Text 3"/>
-          <p:cNvSpPr txBox="1"/>
-          <p:nvPr/>
-        </p:nvSpPr>
-        <p:spPr>
-          <a:xfrm>
-            <a:off x="7424928" y="1938528"/>
-            <a:ext cx="3895344" cy="2347976"/>
-          </a:xfrm>
-          <a:prstGeom prst="rect">
-            <a:avLst/>
-          </a:prstGeom>
-          <a:noFill/>
-          <a:ln/>
-        </p:spPr>
-        <p:txBody>
-          <a:bodyPr wrap="square" lIns="0" tIns="0" rIns="0" bIns="0" rtlCol="0" anchor="t"/>
-          <a:lstStyle/>
-          <a:p>
-            <a:pPr algn="l" indent="0" marL="0">
-              <a:lnSpc>
-                <a:spcPts val="1820"/>
-              </a:lnSpc>
-              <a:buNone/>
-            </a:pPr>
-            <a:r>
-              <a:rPr lang="en-US" sz="1400" dirty="0">
-                <a:solidFill>
-                  <a:srgbClr val="FFFFFF"/>
-                </a:solidFill>
-                <a:latin typeface="Courier New" pitchFamily="34" charset="0"/>
-                <a:ea typeface="Courier New" pitchFamily="34" charset="-122"/>
-                <a:cs typeface="Courier New" pitchFamily="34" charset="-120"/>
-              </a:rPr>
-              <a:t>units = [1, 2, 4, 7, 6, 5]</a:t>
-            </a:r>
-            <a:endParaRPr lang="en-US" sz="1400" dirty="0"/>
-          </a:p>
-          <a:p>
-            <a:pPr algn="l" indent="0" marL="0">
-              <a:lnSpc>
-                <a:spcPts val="1820"/>
-              </a:lnSpc>
-              <a:buNone/>
-            </a:pPr>
-            <a:r>
-              <a:rPr lang="en-US" sz="1400" dirty="0">
-                <a:solidFill>
-                  <a:srgbClr val="FFFFFF"/>
-                </a:solidFill>
-                <a:latin typeface="Courier New" pitchFamily="34" charset="0"/>
-                <a:ea typeface="Courier New" pitchFamily="34" charset="-122"/>
-                <a:cs typeface="Courier New" pitchFamily="34" charset="-120"/>
-              </a:rPr>
-              <a:t>prices = {</a:t>
-            </a:r>
-            <a:endParaRPr lang="en-US" sz="1400" dirty="0"/>
-          </a:p>
-          <a:p>
-            <a:pPr algn="l" indent="0" marL="0">
-              <a:lnSpc>
-                <a:spcPts val="1820"/>
-              </a:lnSpc>
-              <a:buNone/>
-            </a:pPr>
-            <a:r>
-              <a:rPr lang="en-US" sz="1400" dirty="0">
-                <a:solidFill>
-                  <a:srgbClr val="FFFFFF"/>
-                </a:solidFill>
-                <a:latin typeface="Courier New" pitchFamily="34" charset="0"/>
-                <a:ea typeface="Courier New" pitchFamily="34" charset="-122"/>
-                <a:cs typeface="Courier New" pitchFamily="34" charset="-120"/>
-              </a:rPr>
-              <a:t>    </a:t>
-            </a:r>
-            <a:pPr algn="l" indent="0" marL="0">
-              <a:lnSpc>
-                <a:spcPts val="1820"/>
-              </a:lnSpc>
-              <a:buNone/>
-            </a:pPr>
-            <a:r>
-              <a:rPr lang="en-US" sz="1400" dirty="0">
-                <a:solidFill>
-                  <a:srgbClr val="E0BE36"/>
-                </a:solidFill>
-                <a:latin typeface="Courier New" pitchFamily="34" charset="0"/>
-                <a:ea typeface="Courier New" pitchFamily="34" charset="-122"/>
-                <a:cs typeface="Courier New" pitchFamily="34" charset="-120"/>
-              </a:rPr>
-              <a:t>"Book"</a:t>
-            </a:r>
-            <a:pPr algn="l" indent="0" marL="0">
-              <a:lnSpc>
-                <a:spcPts val="1820"/>
-              </a:lnSpc>
-              <a:buNone/>
-            </a:pPr>
-            <a:r>
-              <a:rPr lang="en-US" sz="1400" dirty="0">
-                <a:solidFill>
-                  <a:srgbClr val="FFFFFF"/>
-                </a:solidFill>
-                <a:latin typeface="Courier New" pitchFamily="34" charset="0"/>
-                <a:ea typeface="Courier New" pitchFamily="34" charset="-122"/>
-                <a:cs typeface="Courier New" pitchFamily="34" charset="-120"/>
-              </a:rPr>
-              <a:t>: 3000, </a:t>
-            </a:r>
-            <a:pPr algn="l" indent="0" marL="0">
-              <a:lnSpc>
-                <a:spcPts val="1820"/>
-              </a:lnSpc>
-              <a:buNone/>
-            </a:pPr>
-            <a:r>
-              <a:rPr lang="en-US" sz="1400" dirty="0">
-                <a:solidFill>
-                  <a:srgbClr val="E0BE36"/>
-                </a:solidFill>
-                <a:latin typeface="Courier New" pitchFamily="34" charset="0"/>
-                <a:ea typeface="Courier New" pitchFamily="34" charset="-122"/>
-                <a:cs typeface="Courier New" pitchFamily="34" charset="-120"/>
-              </a:rPr>
-              <a:t>"Pen"</a:t>
-            </a:r>
-            <a:pPr algn="l" indent="0" marL="0">
-              <a:lnSpc>
-                <a:spcPts val="1820"/>
-              </a:lnSpc>
-              <a:buNone/>
-            </a:pPr>
-            <a:r>
-              <a:rPr lang="en-US" sz="1400" dirty="0">
-                <a:solidFill>
-                  <a:srgbClr val="FFFFFF"/>
-                </a:solidFill>
-                <a:latin typeface="Courier New" pitchFamily="34" charset="0"/>
-                <a:ea typeface="Courier New" pitchFamily="34" charset="-122"/>
-                <a:cs typeface="Courier New" pitchFamily="34" charset="-120"/>
-              </a:rPr>
-              <a:t>: 1000,</a:t>
-            </a:r>
-            <a:endParaRPr lang="en-US" sz="1400" dirty="0"/>
-          </a:p>
-          <a:p>
-            <a:pPr algn="l" indent="0" marL="0">
-              <a:lnSpc>
-                <a:spcPts val="1820"/>
-              </a:lnSpc>
-              <a:buNone/>
-            </a:pPr>
-            <a:r>
-              <a:rPr lang="en-US" sz="1400" dirty="0">
-                <a:solidFill>
-                  <a:srgbClr val="FFFFFF"/>
-                </a:solidFill>
-                <a:latin typeface="Courier New" pitchFamily="34" charset="0"/>
-                <a:ea typeface="Courier New" pitchFamily="34" charset="-122"/>
-                <a:cs typeface="Courier New" pitchFamily="34" charset="-120"/>
-              </a:rPr>
-              <a:t>    </a:t>
-            </a:r>
-            <a:pPr algn="l" indent="0" marL="0">
-              <a:lnSpc>
-                <a:spcPts val="1820"/>
-              </a:lnSpc>
-              <a:buNone/>
-            </a:pPr>
-            <a:r>
-              <a:rPr lang="en-US" sz="1400" dirty="0">
-                <a:solidFill>
-                  <a:srgbClr val="E0BE36"/>
-                </a:solidFill>
-                <a:latin typeface="Courier New" pitchFamily="34" charset="0"/>
-                <a:ea typeface="Courier New" pitchFamily="34" charset="-122"/>
-                <a:cs typeface="Courier New" pitchFamily="34" charset="-120"/>
-              </a:rPr>
-              <a:t>"Juice"</a:t>
-            </a:r>
-            <a:pPr algn="l" indent="0" marL="0">
-              <a:lnSpc>
-                <a:spcPts val="1820"/>
-              </a:lnSpc>
-              <a:buNone/>
-            </a:pPr>
-            <a:r>
-              <a:rPr lang="en-US" sz="1400" dirty="0">
-                <a:solidFill>
-                  <a:srgbClr val="FFFFFF"/>
-                </a:solidFill>
-                <a:latin typeface="Courier New" pitchFamily="34" charset="0"/>
-                <a:ea typeface="Courier New" pitchFamily="34" charset="-122"/>
-                <a:cs typeface="Courier New" pitchFamily="34" charset="-120"/>
-              </a:rPr>
-              <a:t>: 2000</a:t>
-            </a:r>
-            <a:endParaRPr lang="en-US" sz="1400" dirty="0"/>
-          </a:p>
-          <a:p>
-            <a:pPr algn="l" indent="0" marL="0">
-              <a:lnSpc>
-                <a:spcPts val="1820"/>
-              </a:lnSpc>
-              <a:buNone/>
-            </a:pPr>
-            <a:r>
-              <a:rPr lang="en-US" sz="1400" dirty="0">
-                <a:solidFill>
-                  <a:srgbClr val="FFFFFF"/>
-                </a:solidFill>
-                <a:latin typeface="Courier New" pitchFamily="34" charset="0"/>
-                <a:ea typeface="Courier New" pitchFamily="34" charset="-122"/>
-                <a:cs typeface="Courier New" pitchFamily="34" charset="-120"/>
-              </a:rPr>
-              <a:t>}</a:t>
-            </a:r>
-            <a:endParaRPr lang="en-US" sz="1400" dirty="0"/>
-          </a:p>
-          <a:p>
-            <a:pPr algn="l" indent="0" marL="0">
-              <a:lnSpc>
-                <a:spcPts val="1820"/>
-              </a:lnSpc>
-              <a:buNone/>
-            </a:pPr>
-            <a:r>
-              <a:rPr lang="en-US" sz="1400" dirty="0">
-                <a:solidFill>
-                  <a:srgbClr val="FFFFFF"/>
-                </a:solidFill>
-                <a:latin typeface="Courier New" pitchFamily="34" charset="0"/>
-                <a:ea typeface="Courier New" pitchFamily="34" charset="-122"/>
-                <a:cs typeface="Courier New" pitchFamily="34" charset="-120"/>
-              </a:rPr>
-              <a:t>print(prices[</a:t>
-            </a:r>
-            <a:pPr algn="l" indent="0" marL="0">
-              <a:lnSpc>
-                <a:spcPts val="1820"/>
-              </a:lnSpc>
-              <a:buNone/>
-            </a:pPr>
-            <a:r>
-              <a:rPr lang="en-US" sz="1400" dirty="0">
-                <a:solidFill>
-                  <a:srgbClr val="E0BE36"/>
-                </a:solidFill>
-                <a:latin typeface="Courier New" pitchFamily="34" charset="0"/>
-                <a:ea typeface="Courier New" pitchFamily="34" charset="-122"/>
-                <a:cs typeface="Courier New" pitchFamily="34" charset="-120"/>
-              </a:rPr>
-              <a:t>"Pen"</a:t>
-            </a:r>
-            <a:pPr algn="l" indent="0" marL="0">
-              <a:lnSpc>
-                <a:spcPts val="1820"/>
-              </a:lnSpc>
-              <a:buNone/>
-            </a:pPr>
-            <a:r>
-              <a:rPr lang="en-US" sz="1400" dirty="0">
-                <a:solidFill>
-                  <a:srgbClr val="FFFFFF"/>
-                </a:solidFill>
-                <a:latin typeface="Courier New" pitchFamily="34" charset="0"/>
-                <a:ea typeface="Courier New" pitchFamily="34" charset="-122"/>
-                <a:cs typeface="Courier New" pitchFamily="34" charset="-120"/>
-              </a:rPr>
-              <a:t>])</a:t>
-            </a:r>
-            <a:endParaRPr lang="en-US" sz="1400" dirty="0"/>
-          </a:p>
-          <a:p>
-            <a:pPr algn="l" indent="0" marL="0">
-              <a:lnSpc>
-                <a:spcPts val="1820"/>
-              </a:lnSpc>
-              <a:buNone/>
-            </a:pPr>
-            <a:r>
-              <a:rPr lang="en-US" sz="1400" dirty="0">
-                <a:solidFill>
-                  <a:srgbClr val="FFFFFF"/>
-                </a:solidFill>
-                <a:latin typeface="Courier New" pitchFamily="34" charset="0"/>
-                <a:ea typeface="Courier New" pitchFamily="34" charset="-122"/>
-                <a:cs typeface="Courier New" pitchFamily="34" charset="-120"/>
-              </a:rPr>
-              <a:t>total_units = 0</a:t>
-            </a:r>
-            <a:endParaRPr lang="en-US" sz="1400" dirty="0"/>
-          </a:p>
-          <a:p>
-            <a:pPr algn="l" indent="0" marL="0">
-              <a:lnSpc>
-                <a:spcPts val="1820"/>
-              </a:lnSpc>
-              <a:buNone/>
-            </a:pPr>
-            <a:r>
-              <a:rPr lang="en-US" sz="1400" b="1" dirty="0">
-                <a:solidFill>
-                  <a:srgbClr val="FFFFFF"/>
-                </a:solidFill>
-                <a:latin typeface="Courier New" pitchFamily="34" charset="0"/>
-                <a:ea typeface="Courier New" pitchFamily="34" charset="-122"/>
-                <a:cs typeface="Courier New" pitchFamily="34" charset="-120"/>
-              </a:rPr>
-              <a:t>for</a:t>
-            </a:r>
-            <a:pPr algn="l" indent="0" marL="0">
-              <a:lnSpc>
-                <a:spcPts val="1820"/>
-              </a:lnSpc>
-              <a:buNone/>
-            </a:pPr>
-            <a:r>
-              <a:rPr lang="en-US" sz="1400" dirty="0">
-                <a:solidFill>
-                  <a:srgbClr val="FFFFFF"/>
-                </a:solidFill>
-                <a:latin typeface="Courier New" pitchFamily="34" charset="0"/>
-                <a:ea typeface="Courier New" pitchFamily="34" charset="-122"/>
-                <a:cs typeface="Courier New" pitchFamily="34" charset="-120"/>
-              </a:rPr>
-              <a:t> u </a:t>
-            </a:r>
-            <a:pPr algn="l" indent="0" marL="0">
-              <a:lnSpc>
-                <a:spcPts val="1820"/>
-              </a:lnSpc>
-              <a:buNone/>
-            </a:pPr>
-            <a:r>
-              <a:rPr lang="en-US" sz="1400" b="1" dirty="0">
-                <a:solidFill>
-                  <a:srgbClr val="FFFFFF"/>
-                </a:solidFill>
-                <a:latin typeface="Courier New" pitchFamily="34" charset="0"/>
-                <a:ea typeface="Courier New" pitchFamily="34" charset="-122"/>
-                <a:cs typeface="Courier New" pitchFamily="34" charset="-120"/>
-              </a:rPr>
-              <a:t>in</a:t>
-            </a:r>
-            <a:pPr algn="l" indent="0" marL="0">
-              <a:lnSpc>
-                <a:spcPts val="1820"/>
-              </a:lnSpc>
-              <a:buNone/>
-            </a:pPr>
-            <a:r>
-              <a:rPr lang="en-US" sz="1400" dirty="0">
-                <a:solidFill>
-                  <a:srgbClr val="FFFFFF"/>
-                </a:solidFill>
-                <a:latin typeface="Courier New" pitchFamily="34" charset="0"/>
-                <a:ea typeface="Courier New" pitchFamily="34" charset="-122"/>
-                <a:cs typeface="Courier New" pitchFamily="34" charset="-120"/>
-              </a:rPr>
-              <a:t> units:</a:t>
-            </a:r>
-            <a:endParaRPr lang="en-US" sz="1400" dirty="0"/>
-          </a:p>
-          <a:p>
-            <a:pPr algn="l" indent="0" marL="0">
-              <a:lnSpc>
-                <a:spcPts val="1820"/>
-              </a:lnSpc>
-              <a:buNone/>
-            </a:pPr>
-            <a:r>
-              <a:rPr lang="en-US" sz="1400" dirty="0">
-                <a:solidFill>
-                  <a:srgbClr val="FFFFFF"/>
-                </a:solidFill>
-                <a:latin typeface="Courier New" pitchFamily="34" charset="0"/>
-                <a:ea typeface="Courier New" pitchFamily="34" charset="-122"/>
-                <a:cs typeface="Courier New" pitchFamily="34" charset="-120"/>
-              </a:rPr>
-              <a:t>    total_units = total_units + u</a:t>
-            </a:r>
-            <a:endParaRPr lang="en-US" sz="1400" dirty="0"/>
-          </a:p>
-          <a:p>
-            <a:pPr algn="l" indent="0" marL="0">
-              <a:lnSpc>
-                <a:spcPts val="1820"/>
-              </a:lnSpc>
-              <a:buNone/>
-            </a:pPr>
-            <a:r>
-              <a:rPr lang="en-US" sz="1400" dirty="0">
-                <a:solidFill>
-                  <a:srgbClr val="FFFFFF"/>
-                </a:solidFill>
-                <a:latin typeface="Courier New" pitchFamily="34" charset="0"/>
-                <a:ea typeface="Courier New" pitchFamily="34" charset="-122"/>
-                <a:cs typeface="Courier New" pitchFamily="34" charset="-120"/>
-              </a:rPr>
-              <a:t>print(total_units)</a:t>
-            </a:r>
-            <a:endParaRPr lang="en-US" sz="1400" dirty="0"/>
-          </a:p>
-        </p:txBody>
-      </p:sp>
+        </p:nvPicPr>
+        <p:blipFill>
+          <a:blip r:embed="rId1"/>
+          <a:stretch>
+            <a:fillRect/>
+          </a:stretch>
+        </p:blipFill>
+        <p:spPr>
+          <a:xfrm>
+            <a:off x="9418320" y="2103120"/>
+            <a:ext cx="1828800" cy="1828800"/>
+          </a:xfrm>
+          <a:prstGeom prst="rect">
+            <a:avLst/>
+          </a:prstGeom>
+        </p:spPr>
+      </p:pic>
       <p:sp>
         <p:nvSpPr>
           <p:cNvPr id="25" name="Slide Number Placeholder 0"/>
@@ -6771,15 +6364,15 @@
           <a:p>
             <a:pPr algn="l" indent="0" marL="0">
               <a:lnSpc>
-                <a:spcPts val="3600"/>
+                <a:spcPts val="3240"/>
               </a:lnSpc>
               <a:spcAft>
-                <a:spcPts val="2520"/>
+                <a:spcPts val="2020"/>
               </a:spcAft>
               <a:buNone/>
             </a:pPr>
             <a:r>
-              <a:rPr lang="en-US" sz="3000" dirty="0">
+              <a:rPr lang="en-US" sz="2700" dirty="0">
                 <a:solidFill>
                   <a:srgbClr val="111111"/>
                 </a:solidFill>
@@ -6787,22 +6380,22 @@
                 <a:ea typeface="Lato" pitchFamily="34" charset="-122"/>
                 <a:cs typeface="Lato" pitchFamily="34" charset="-120"/>
               </a:rPr>
-              <a:t>Make a list [2, 4, 6]. Print each value plus 1 with a loop. Make a dictionary with the keys name and stock and print the stock. Explain why position 0 is the first.</a:t>
-            </a:r>
-            <a:endParaRPr lang="en-US" sz="3000" dirty="0"/>
-          </a:p>
-          <a:p>
-            <a:pPr algn="l" indent="0" marL="0">
-              <a:lnSpc>
-                <a:spcPts val="3600"/>
+              <a:t>Make a list [2, 4, 6].</a:t>
+            </a:r>
+            <a:endParaRPr lang="en-US" sz="2700" dirty="0"/>
+          </a:p>
+          <a:p>
+            <a:pPr algn="l" indent="0" marL="0">
+              <a:lnSpc>
+                <a:spcPts val="3240"/>
               </a:lnSpc>
               <a:spcAft>
-                <a:spcPts val="2520"/>
+                <a:spcPts val="2020"/>
               </a:spcAft>
               <a:buNone/>
             </a:pPr>
             <a:r>
-              <a:rPr lang="en-US" sz="3000" dirty="0">
+              <a:rPr lang="en-US" sz="2700" dirty="0">
                 <a:solidFill>
                   <a:srgbClr val="111111"/>
                 </a:solidFill>
@@ -6810,9 +6403,78 @@
                 <a:ea typeface="Lato" pitchFamily="34" charset="-122"/>
                 <a:cs typeface="Lato" pitchFamily="34" charset="-120"/>
               </a:rPr>
+              <a:t>Print each value plus 1 with a loop.</a:t>
+            </a:r>
+            <a:endParaRPr lang="en-US" sz="2700" dirty="0"/>
+          </a:p>
+          <a:p>
+            <a:pPr algn="l" indent="0" marL="0">
+              <a:lnSpc>
+                <a:spcPts val="3240"/>
+              </a:lnSpc>
+              <a:spcAft>
+                <a:spcPts val="2020"/>
+              </a:spcAft>
+              <a:buNone/>
+            </a:pPr>
+            <a:r>
+              <a:rPr lang="en-US" sz="2700" dirty="0">
+                <a:solidFill>
+                  <a:srgbClr val="111111"/>
+                </a:solidFill>
+                <a:latin typeface="Lato" pitchFamily="34" charset="0"/>
+                <a:ea typeface="Lato" pitchFamily="34" charset="-122"/>
+                <a:cs typeface="Lato" pitchFamily="34" charset="-120"/>
+              </a:rPr>
+              <a:t>Make a dictionary with the keys name and stock and print the stock.</a:t>
+            </a:r>
+            <a:endParaRPr lang="en-US" sz="2700" dirty="0"/>
+          </a:p>
+          <a:p>
+            <a:pPr algn="l" indent="0" marL="0">
+              <a:lnSpc>
+                <a:spcPts val="3240"/>
+              </a:lnSpc>
+              <a:spcAft>
+                <a:spcPts val="2020"/>
+              </a:spcAft>
+              <a:buNone/>
+            </a:pPr>
+            <a:r>
+              <a:rPr lang="en-US" sz="2700" dirty="0">
+                <a:solidFill>
+                  <a:srgbClr val="111111"/>
+                </a:solidFill>
+                <a:latin typeface="Lato" pitchFamily="34" charset="0"/>
+                <a:ea typeface="Lato" pitchFamily="34" charset="-122"/>
+                <a:cs typeface="Lato" pitchFamily="34" charset="-120"/>
+              </a:rPr>
+              <a:t>Explain why position 0 is the first.</a:t>
+            </a:r>
+            <a:endParaRPr lang="en-US" sz="2700" dirty="0"/>
+          </a:p>
+          <a:p>
+            <a:pPr algn="l" indent="0" marL="0">
+              <a:lnSpc>
+                <a:spcPts val="3240"/>
+              </a:lnSpc>
+              <a:spcAft>
+                <a:spcPts val="2020"/>
+              </a:spcAft>
+              <a:buNone/>
+            </a:pPr>
+            <a:r>
+              <a:rPr lang="en-US" sz="2700" dirty="0">
+                <a:solidFill>
+                  <a:srgbClr val="111111"/>
+                </a:solidFill>
+                <a:latin typeface="Lato" pitchFamily="34" charset="0"/>
+                <a:ea typeface="Lato" pitchFamily="34" charset="-122"/>
+                <a:cs typeface="Lato" pitchFamily="34" charset="-120"/>
+              </a:rPr>
               <a:t>Save it as DA05. Write two sentences: what you changed and how you checked it.</a:t>
             </a:r>
-            <a:endParaRPr lang="en-US" sz="3000" dirty="0"/>
+            <a:endParaRPr lang="en-US" sz="2700" dirty="0"/>
           </a:p>
         </p:txBody>
       </p:sp>
